--- a/output_pptx/Glorious_Day.pptx
+++ b/output_pptx/Glorious_Day.pptx
@@ -3110,8 +3110,8 @@
         </p:nvSpPr>
         <p:spPr>
           <a:xfrm>
-            <a:off x="594360" y="1837944"/>
-            <a:ext cx="11002975" cy="685800"/>
+            <a:off x="640080" y="1650492"/>
+            <a:ext cx="10911535" cy="731520"/>
           </a:xfrm>
           <a:prstGeom prst="rect">
             <a:avLst/>
@@ -3126,7 +3126,7 @@
           <a:p>
             <a:pPr algn="ctr"/>
             <a:r>
-              <a:rPr sz="4400" b="1" i="0">
+              <a:rPr sz="4800" b="1" i="0">
                 <a:solidFill>
                   <a:srgbClr val="FFFFFF"/>
                 </a:solidFill>
@@ -3145,8 +3145,8 @@
         </p:nvSpPr>
         <p:spPr>
           <a:xfrm>
-            <a:off x="594360" y="2560320"/>
-            <a:ext cx="11002975" cy="384048"/>
+            <a:off x="640080" y="2418588"/>
+            <a:ext cx="10911535" cy="365760"/>
           </a:xfrm>
           <a:prstGeom prst="rect">
             <a:avLst/>
@@ -3163,7 +3163,7 @@
             <a:r>
               <a:rPr sz="2400" b="0" i="1">
                 <a:solidFill>
-                  <a:srgbClr val="B4B4B4"/>
+                  <a:srgbClr val="AAAAAA"/>
                 </a:solidFill>
                 <a:latin typeface="Arial"/>
               </a:rPr>
@@ -3180,8 +3180,8 @@
         </p:nvSpPr>
         <p:spPr>
           <a:xfrm>
-            <a:off x="594360" y="2980944"/>
-            <a:ext cx="11002975" cy="347472"/>
+            <a:off x="640080" y="2985516"/>
+            <a:ext cx="10911535" cy="731520"/>
           </a:xfrm>
           <a:prstGeom prst="rect">
             <a:avLst/>
@@ -3196,13 +3196,13 @@
           <a:p>
             <a:pPr algn="ctr"/>
             <a:r>
-              <a:rPr sz="2000" b="0" i="1">
-                <a:solidFill>
-                  <a:srgbClr val="8C8C8C"/>
+              <a:rPr sz="4800" b="1" i="0">
+                <a:solidFill>
+                  <a:srgbClr val="FFFFFF"/>
                 </a:solidFill>
                 <a:latin typeface="Arial"/>
               </a:rPr>
-              <a:t/>
+              <a:t>古きはいま過ぎ去る</a:t>
             </a:r>
           </a:p>
         </p:txBody>
@@ -3215,8 +3215,8 @@
         </p:nvSpPr>
         <p:spPr>
           <a:xfrm>
-            <a:off x="594360" y="3529584"/>
-            <a:ext cx="11002975" cy="685800"/>
+            <a:off x="640080" y="3753612"/>
+            <a:ext cx="10911535" cy="365760"/>
           </a:xfrm>
           <a:prstGeom prst="rect">
             <a:avLst/>
@@ -3231,13 +3231,13 @@
           <a:p>
             <a:pPr algn="ctr"/>
             <a:r>
-              <a:rPr sz="4400" b="1" i="0">
-                <a:solidFill>
-                  <a:srgbClr val="FFFFFF"/>
+              <a:rPr sz="2400" b="0" i="1">
+                <a:solidFill>
+                  <a:srgbClr val="AAAAAA"/>
                 </a:solidFill>
                 <a:latin typeface="Arial"/>
               </a:rPr>
-              <a:t>古きはいま過ぎ去る</a:t>
+              <a:t>furuki wa  ima sugisaru</a:t>
             </a:r>
           </a:p>
         </p:txBody>
@@ -3250,8 +3250,8 @@
         </p:nvSpPr>
         <p:spPr>
           <a:xfrm>
-            <a:off x="594360" y="4251960"/>
-            <a:ext cx="11002975" cy="384048"/>
+            <a:off x="640080" y="4530852"/>
+            <a:ext cx="10911535" cy="310896"/>
           </a:xfrm>
           <a:prstGeom prst="rect">
             <a:avLst/>
@@ -3266,13 +3266,13 @@
           <a:p>
             <a:pPr algn="ctr"/>
             <a:r>
-              <a:rPr sz="2400" b="0" i="1">
-                <a:solidFill>
-                  <a:srgbClr val="B4B4B4"/>
+              <a:rPr sz="2000" b="0" i="1">
+                <a:solidFill>
+                  <a:srgbClr val="828282"/>
                 </a:solidFill>
                 <a:latin typeface="Arial"/>
               </a:rPr>
-              <a:t>furuki wa  ima sugisaru</a:t>
+              <a:t>Dia Glorioso (Vivendo, Ele Me Amou)</a:t>
             </a:r>
           </a:p>
         </p:txBody>
@@ -3285,8 +3285,8 @@
         </p:nvSpPr>
         <p:spPr>
           <a:xfrm>
-            <a:off x="594360" y="4672584"/>
-            <a:ext cx="11002975" cy="347472"/>
+            <a:off x="640080" y="4896612"/>
+            <a:ext cx="10911535" cy="310896"/>
           </a:xfrm>
           <a:prstGeom prst="rect">
             <a:avLst/>
@@ -3303,11 +3303,11 @@
             <a:r>
               <a:rPr sz="2000" b="0" i="1">
                 <a:solidFill>
-                  <a:srgbClr val="8C8C8C"/>
+                  <a:srgbClr val="828282"/>
                 </a:solidFill>
                 <a:latin typeface="Arial"/>
               </a:rPr>
-              <a:t/>
+              <a:t>Um dia, quando o céu estava cheio de louvores</a:t>
             </a:r>
           </a:p>
         </p:txBody>
@@ -3346,8 +3346,8 @@
         </p:nvSpPr>
         <p:spPr>
           <a:xfrm>
-            <a:off x="594360" y="1837944"/>
-            <a:ext cx="11002975" cy="685800"/>
+            <a:off x="640080" y="1650492"/>
+            <a:ext cx="10911535" cy="731520"/>
           </a:xfrm>
           <a:prstGeom prst="rect">
             <a:avLst/>
@@ -3362,7 +3362,7 @@
           <a:p>
             <a:pPr algn="ctr"/>
             <a:r>
-              <a:rPr sz="4400" b="1" i="0">
+              <a:rPr sz="4800" b="1" i="0">
                 <a:solidFill>
                   <a:srgbClr val="FFFFFF"/>
                 </a:solidFill>
@@ -3381,8 +3381,8 @@
         </p:nvSpPr>
         <p:spPr>
           <a:xfrm>
-            <a:off x="594360" y="2560320"/>
-            <a:ext cx="11002975" cy="384048"/>
+            <a:off x="640080" y="2418588"/>
+            <a:ext cx="10911535" cy="365760"/>
           </a:xfrm>
           <a:prstGeom prst="rect">
             <a:avLst/>
@@ -3399,7 +3399,7 @@
             <a:r>
               <a:rPr sz="2400" b="0" i="1">
                 <a:solidFill>
-                  <a:srgbClr val="B4B4B4"/>
+                  <a:srgbClr val="AAAAAA"/>
                 </a:solidFill>
                 <a:latin typeface="Arial"/>
               </a:rPr>
@@ -3416,8 +3416,8 @@
         </p:nvSpPr>
         <p:spPr>
           <a:xfrm>
-            <a:off x="594360" y="2980944"/>
-            <a:ext cx="11002975" cy="347472"/>
+            <a:off x="640080" y="2985516"/>
+            <a:ext cx="10911535" cy="731520"/>
           </a:xfrm>
           <a:prstGeom prst="rect">
             <a:avLst/>
@@ -3432,13 +3432,13 @@
           <a:p>
             <a:pPr algn="ctr"/>
             <a:r>
-              <a:rPr sz="2000" b="0" i="1">
-                <a:solidFill>
-                  <a:srgbClr val="8C8C8C"/>
+              <a:rPr sz="4800" b="1" i="0">
+                <a:solidFill>
+                  <a:srgbClr val="FFFFFF"/>
                 </a:solidFill>
                 <a:latin typeface="Arial"/>
               </a:rPr>
-              <a:t>Habitou entre os homens, é meu exemplo</a:t>
+              <a:t>主の栄光の日へと走る</a:t>
             </a:r>
           </a:p>
         </p:txBody>
@@ -3451,8 +3451,8 @@
         </p:nvSpPr>
         <p:spPr>
           <a:xfrm>
-            <a:off x="594360" y="3529584"/>
-            <a:ext cx="11002975" cy="685800"/>
+            <a:off x="640080" y="3753612"/>
+            <a:ext cx="10911535" cy="365760"/>
           </a:xfrm>
           <a:prstGeom prst="rect">
             <a:avLst/>
@@ -3467,13 +3467,13 @@
           <a:p>
             <a:pPr algn="ctr"/>
             <a:r>
-              <a:rPr sz="4400" b="1" i="0">
-                <a:solidFill>
-                  <a:srgbClr val="FFFFFF"/>
+              <a:rPr sz="2400" b="0" i="1">
+                <a:solidFill>
+                  <a:srgbClr val="AAAAAA"/>
                 </a:solidFill>
                 <a:latin typeface="Arial"/>
               </a:rPr>
-              <a:t>主の栄光の日へと走る</a:t>
+              <a:t>shu no eikou no hi heto hashiru</a:t>
             </a:r>
           </a:p>
         </p:txBody>
@@ -3486,8 +3486,8 @@
         </p:nvSpPr>
         <p:spPr>
           <a:xfrm>
-            <a:off x="594360" y="4251960"/>
-            <a:ext cx="11002975" cy="384048"/>
+            <a:off x="640080" y="4530852"/>
+            <a:ext cx="10911535" cy="310896"/>
           </a:xfrm>
           <a:prstGeom prst="rect">
             <a:avLst/>
@@ -3502,13 +3502,13 @@
           <a:p>
             <a:pPr algn="ctr"/>
             <a:r>
-              <a:rPr sz="2400" b="0" i="1">
-                <a:solidFill>
-                  <a:srgbClr val="B4B4B4"/>
+              <a:rPr sz="2000" b="0" i="1">
+                <a:solidFill>
+                  <a:srgbClr val="828282"/>
                 </a:solidFill>
                 <a:latin typeface="Arial"/>
               </a:rPr>
-              <a:t>shu no eikou no hi heto hashiru</a:t>
+              <a:t>Habitou entre os homens, é meu exemplo</a:t>
             </a:r>
           </a:p>
         </p:txBody>
@@ -3521,8 +3521,8 @@
         </p:nvSpPr>
         <p:spPr>
           <a:xfrm>
-            <a:off x="594360" y="4672584"/>
-            <a:ext cx="11002975" cy="347472"/>
+            <a:off x="640080" y="4896612"/>
+            <a:ext cx="10911535" cy="310896"/>
           </a:xfrm>
           <a:prstGeom prst="rect">
             <a:avLst/>
@@ -3539,7 +3539,7 @@
             <a:r>
               <a:rPr sz="2000" b="0" i="1">
                 <a:solidFill>
-                  <a:srgbClr val="8C8C8C"/>
+                  <a:srgbClr val="828282"/>
                 </a:solidFill>
                 <a:latin typeface="Arial"/>
               </a:rPr>
@@ -3582,8 +3582,8 @@
         </p:nvSpPr>
         <p:spPr>
           <a:xfrm>
-            <a:off x="594360" y="1837944"/>
-            <a:ext cx="11002975" cy="685800"/>
+            <a:off x="640080" y="1650492"/>
+            <a:ext cx="10911535" cy="731520"/>
           </a:xfrm>
           <a:prstGeom prst="rect">
             <a:avLst/>
@@ -3598,7 +3598,7 @@
           <a:p>
             <a:pPr algn="ctr"/>
             <a:r>
-              <a:rPr sz="4400" b="1" i="0">
+              <a:rPr sz="4800" b="1" i="0">
                 <a:solidFill>
                   <a:srgbClr val="FFFFFF"/>
                 </a:solidFill>
@@ -3617,8 +3617,8 @@
         </p:nvSpPr>
         <p:spPr>
           <a:xfrm>
-            <a:off x="594360" y="2560320"/>
-            <a:ext cx="11002975" cy="384048"/>
+            <a:off x="640080" y="2418588"/>
+            <a:ext cx="10911535" cy="365760"/>
           </a:xfrm>
           <a:prstGeom prst="rect">
             <a:avLst/>
@@ -3635,7 +3635,7 @@
             <a:r>
               <a:rPr sz="2400" b="0" i="1">
                 <a:solidFill>
-                  <a:srgbClr val="B4B4B4"/>
+                  <a:srgbClr val="AAAAAA"/>
                 </a:solidFill>
                 <a:latin typeface="Arial"/>
               </a:rPr>
@@ -3652,8 +3652,8 @@
         </p:nvSpPr>
         <p:spPr>
           <a:xfrm>
-            <a:off x="594360" y="2980944"/>
-            <a:ext cx="11002975" cy="347472"/>
+            <a:off x="640080" y="2985516"/>
+            <a:ext cx="10911535" cy="731520"/>
           </a:xfrm>
           <a:prstGeom prst="rect">
             <a:avLst/>
@@ -3668,13 +3668,13 @@
           <a:p>
             <a:pPr algn="ctr"/>
             <a:r>
-              <a:rPr sz="2000" b="0" i="1">
-                <a:solidFill>
-                  <a:srgbClr val="8C8C8C"/>
+              <a:rPr sz="4800" b="1" i="0">
+                <a:solidFill>
+                  <a:srgbClr val="FFFFFF"/>
                 </a:solidFill>
                 <a:latin typeface="Arial"/>
               </a:rPr>
-              <a:t>Sua glória revelada</a:t>
+              <a:t>主の栄光の日へと走る (riff)</a:t>
             </a:r>
           </a:p>
         </p:txBody>
@@ -3687,8 +3687,8 @@
         </p:nvSpPr>
         <p:spPr>
           <a:xfrm>
-            <a:off x="594360" y="3529584"/>
-            <a:ext cx="11002975" cy="685800"/>
+            <a:off x="640080" y="3753612"/>
+            <a:ext cx="10911535" cy="365760"/>
           </a:xfrm>
           <a:prstGeom prst="rect">
             <a:avLst/>
@@ -3703,13 +3703,13 @@
           <a:p>
             <a:pPr algn="ctr"/>
             <a:r>
-              <a:rPr sz="4400" b="1" i="0">
-                <a:solidFill>
-                  <a:srgbClr val="FFFFFF"/>
+              <a:rPr sz="2400" b="0" i="1">
+                <a:solidFill>
+                  <a:srgbClr val="AAAAAA"/>
                 </a:solidFill>
                 <a:latin typeface="Arial"/>
               </a:rPr>
-              <a:t>主の栄光の日へと走る (riff)</a:t>
+              <a:t>shu no eikou no hi hetohashiru</a:t>
             </a:r>
           </a:p>
         </p:txBody>
@@ -3722,8 +3722,8 @@
         </p:nvSpPr>
         <p:spPr>
           <a:xfrm>
-            <a:off x="594360" y="4251960"/>
-            <a:ext cx="11002975" cy="384048"/>
+            <a:off x="640080" y="4530852"/>
+            <a:ext cx="10911535" cy="310896"/>
           </a:xfrm>
           <a:prstGeom prst="rect">
             <a:avLst/>
@@ -3738,13 +3738,13 @@
           <a:p>
             <a:pPr algn="ctr"/>
             <a:r>
-              <a:rPr sz="2400" b="0" i="1">
-                <a:solidFill>
-                  <a:srgbClr val="B4B4B4"/>
+              <a:rPr sz="2000" b="0" i="1">
+                <a:solidFill>
+                  <a:srgbClr val="828282"/>
                 </a:solidFill>
                 <a:latin typeface="Arial"/>
               </a:rPr>
-              <a:t>shu no eikou no hi hetohashiru</a:t>
+              <a:t>Sua glória revelada</a:t>
             </a:r>
           </a:p>
         </p:txBody>
@@ -3757,8 +3757,8 @@
         </p:nvSpPr>
         <p:spPr>
           <a:xfrm>
-            <a:off x="594360" y="4672584"/>
-            <a:ext cx="11002975" cy="347472"/>
+            <a:off x="640080" y="4896612"/>
+            <a:ext cx="10911535" cy="310896"/>
           </a:xfrm>
           <a:prstGeom prst="rect">
             <a:avLst/>
@@ -3775,7 +3775,7 @@
             <a:r>
               <a:rPr sz="2000" b="0" i="1">
                 <a:solidFill>
-                  <a:srgbClr val="8C8C8C"/>
+                  <a:srgbClr val="828282"/>
                 </a:solidFill>
                 <a:latin typeface="Arial"/>
               </a:rPr>
@@ -3818,8 +3818,8 @@
         </p:nvSpPr>
         <p:spPr>
           <a:xfrm>
-            <a:off x="594360" y="2258568"/>
-            <a:ext cx="11002975" cy="685800"/>
+            <a:off x="640080" y="2052828"/>
+            <a:ext cx="10911535" cy="731520"/>
           </a:xfrm>
           <a:prstGeom prst="rect">
             <a:avLst/>
@@ -3834,7 +3834,7 @@
           <a:p>
             <a:pPr algn="ctr"/>
             <a:r>
-              <a:rPr sz="4400" b="1" i="0">
+              <a:rPr sz="4800" b="1" i="0">
                 <a:solidFill>
                   <a:srgbClr val="FFFFFF"/>
                 </a:solidFill>
@@ -3853,8 +3853,8 @@
         </p:nvSpPr>
         <p:spPr>
           <a:xfrm>
-            <a:off x="594360" y="2980944"/>
-            <a:ext cx="11002975" cy="347472"/>
+            <a:off x="640080" y="2985516"/>
+            <a:ext cx="10911535" cy="731520"/>
           </a:xfrm>
           <a:prstGeom prst="rect">
             <a:avLst/>
@@ -3869,83 +3869,13 @@
           <a:p>
             <a:pPr algn="ctr"/>
             <a:r>
-              <a:rPr sz="2200" b="0" i="1">
-                <a:solidFill>
-                  <a:srgbClr val="8C8C8C"/>
-                </a:solidFill>
-                <a:latin typeface="Arial"/>
-              </a:rPr>
-              <a:t/>
-            </a:r>
-          </a:p>
-        </p:txBody>
-      </p:sp>
-      <p:sp>
-        <p:nvSpPr>
-          <p:cNvPr id="4" name="TextBox 3"/>
-          <p:cNvSpPr txBox="1"/>
-          <p:nvPr/>
-        </p:nvSpPr>
-        <p:spPr>
-          <a:xfrm>
-            <a:off x="594360" y="3529584"/>
-            <a:ext cx="11002975" cy="685800"/>
-          </a:xfrm>
-          <a:prstGeom prst="rect">
-            <a:avLst/>
-          </a:prstGeom>
-          <a:noFill/>
-        </p:spPr>
-        <p:txBody>
-          <a:bodyPr wrap="square">
-            <a:spAutoFit/>
-          </a:bodyPr>
-          <a:lstStyle/>
-          <a:p>
-            <a:pPr algn="ctr"/>
-            <a:r>
-              <a:rPr sz="4400" b="1" i="0">
+              <a:rPr sz="4800" b="1" i="0">
                 <a:solidFill>
                   <a:srgbClr val="FFFFFF"/>
                 </a:solidFill>
                 <a:latin typeface="Arial"/>
               </a:rPr>
               <a:t>Ressuscitado, Ele me justificou</a:t>
-            </a:r>
-          </a:p>
-        </p:txBody>
-      </p:sp>
-      <p:sp>
-        <p:nvSpPr>
-          <p:cNvPr id="5" name="TextBox 4"/>
-          <p:cNvSpPr txBox="1"/>
-          <p:nvPr/>
-        </p:nvSpPr>
-        <p:spPr>
-          <a:xfrm>
-            <a:off x="594360" y="4251960"/>
-            <a:ext cx="11002975" cy="347472"/>
-          </a:xfrm>
-          <a:prstGeom prst="rect">
-            <a:avLst/>
-          </a:prstGeom>
-          <a:noFill/>
-        </p:spPr>
-        <p:txBody>
-          <a:bodyPr wrap="square">
-            <a:spAutoFit/>
-          </a:bodyPr>
-          <a:lstStyle/>
-          <a:p>
-            <a:pPr algn="ctr"/>
-            <a:r>
-              <a:rPr sz="2200" b="0" i="1">
-                <a:solidFill>
-                  <a:srgbClr val="8C8C8C"/>
-                </a:solidFill>
-                <a:latin typeface="Arial"/>
-              </a:rPr>
-              <a:t/>
             </a:r>
           </a:p>
         </p:txBody>
@@ -3984,8 +3914,8 @@
         </p:nvSpPr>
         <p:spPr>
           <a:xfrm>
-            <a:off x="594360" y="2258568"/>
-            <a:ext cx="11002975" cy="685800"/>
+            <a:off x="640080" y="2052828"/>
+            <a:ext cx="10911535" cy="731520"/>
           </a:xfrm>
           <a:prstGeom prst="rect">
             <a:avLst/>
@@ -4000,7 +3930,7 @@
           <a:p>
             <a:pPr algn="ctr"/>
             <a:r>
-              <a:rPr sz="3705" b="1" i="0">
+              <a:rPr sz="4000" b="1" i="0">
                 <a:solidFill>
                   <a:srgbClr val="FFFFFF"/>
                 </a:solidFill>
@@ -4019,8 +3949,8 @@
         </p:nvSpPr>
         <p:spPr>
           <a:xfrm>
-            <a:off x="594360" y="2980944"/>
-            <a:ext cx="11002975" cy="347472"/>
+            <a:off x="640080" y="2985516"/>
+            <a:ext cx="10911535" cy="731520"/>
           </a:xfrm>
           <a:prstGeom prst="rect">
             <a:avLst/>
@@ -4035,13 +3965,13 @@
           <a:p>
             <a:pPr algn="ctr"/>
             <a:r>
-              <a:rPr sz="2200" b="0" i="1">
-                <a:solidFill>
-                  <a:srgbClr val="8C8C8C"/>
+              <a:rPr sz="3300" b="1" i="0">
+                <a:solidFill>
+                  <a:srgbClr val="FFFFFF"/>
                 </a:solidFill>
                 <a:latin typeface="Arial"/>
               </a:rPr>
-              <a:t>死の墓を　いま飛び出す</a:t>
+              <a:t>O Verbo se fez carne e a luz brilhou entre nós</a:t>
             </a:r>
           </a:p>
         </p:txBody>
@@ -4054,8 +3984,8 @@
         </p:nvSpPr>
         <p:spPr>
           <a:xfrm>
-            <a:off x="594360" y="3529584"/>
-            <a:ext cx="11002975" cy="685800"/>
+            <a:off x="640080" y="4128516"/>
+            <a:ext cx="10911535" cy="310896"/>
           </a:xfrm>
           <a:prstGeom prst="rect">
             <a:avLst/>
@@ -4070,13 +4000,13 @@
           <a:p>
             <a:pPr algn="ctr"/>
             <a:r>
-              <a:rPr sz="3060" b="1" i="0">
-                <a:solidFill>
-                  <a:srgbClr val="FFFFFF"/>
+              <a:rPr sz="2000" b="0" i="0">
+                <a:solidFill>
+                  <a:srgbClr val="828282"/>
                 </a:solidFill>
                 <a:latin typeface="Arial"/>
               </a:rPr>
-              <a:t>O Verbo se fez carne e a luz brilhou entre nós</a:t>
+              <a:t>死の墓を　いま飛び出す</a:t>
             </a:r>
           </a:p>
         </p:txBody>
@@ -4089,8 +4019,8 @@
         </p:nvSpPr>
         <p:spPr>
           <a:xfrm>
-            <a:off x="594360" y="4251960"/>
-            <a:ext cx="11002975" cy="347472"/>
+            <a:off x="640080" y="4494276"/>
+            <a:ext cx="10911535" cy="310896"/>
           </a:xfrm>
           <a:prstGeom prst="rect">
             <a:avLst/>
@@ -4105,9 +4035,9 @@
           <a:p>
             <a:pPr algn="ctr"/>
             <a:r>
-              <a:rPr sz="2200" b="0" i="1">
-                <a:solidFill>
-                  <a:srgbClr val="8C8C8C"/>
+              <a:rPr sz="2000" b="0" i="0">
+                <a:solidFill>
+                  <a:srgbClr val="828282"/>
                 </a:solidFill>
                 <a:latin typeface="Arial"/>
               </a:rPr>
@@ -4150,8 +4080,8 @@
         </p:nvSpPr>
         <p:spPr>
           <a:xfrm>
-            <a:off x="594360" y="2258568"/>
-            <a:ext cx="11002975" cy="685800"/>
+            <a:off x="640080" y="2052828"/>
+            <a:ext cx="10911535" cy="731520"/>
           </a:xfrm>
           <a:prstGeom prst="rect">
             <a:avLst/>
@@ -4166,7 +4096,7 @@
           <a:p>
             <a:pPr algn="ctr"/>
             <a:r>
-              <a:rPr sz="4400" b="1" i="0">
+              <a:rPr sz="4800" b="1" i="0">
                 <a:solidFill>
                   <a:srgbClr val="FFFFFF"/>
                 </a:solidFill>
@@ -4185,8 +4115,8 @@
         </p:nvSpPr>
         <p:spPr>
           <a:xfrm>
-            <a:off x="594360" y="2980944"/>
-            <a:ext cx="11002975" cy="347472"/>
+            <a:off x="640080" y="2985516"/>
+            <a:ext cx="10911535" cy="731520"/>
           </a:xfrm>
           <a:prstGeom prst="rect">
             <a:avLst/>
@@ -4201,13 +4131,13 @@
           <a:p>
             <a:pPr algn="ctr"/>
             <a:r>
-              <a:rPr sz="2200" b="0" i="1">
-                <a:solidFill>
-                  <a:srgbClr val="8C8C8C"/>
+              <a:rPr sz="4800" b="1" i="0">
+                <a:solidFill>
+                  <a:srgbClr val="FFFFFF"/>
                 </a:solidFill>
                 <a:latin typeface="Arial"/>
               </a:rPr>
-              <a:t>死の墓を　いま飛び出そう</a:t>
+              <a:t>Vivendo, Ele me amou</a:t>
             </a:r>
           </a:p>
         </p:txBody>
@@ -4220,8 +4150,8 @@
         </p:nvSpPr>
         <p:spPr>
           <a:xfrm>
-            <a:off x="594360" y="3529584"/>
-            <a:ext cx="11002975" cy="685800"/>
+            <a:off x="640080" y="4128516"/>
+            <a:ext cx="10911535" cy="310896"/>
           </a:xfrm>
           <a:prstGeom prst="rect">
             <a:avLst/>
@@ -4236,13 +4166,13 @@
           <a:p>
             <a:pPr algn="ctr"/>
             <a:r>
-              <a:rPr sz="4400" b="1" i="0">
-                <a:solidFill>
-                  <a:srgbClr val="FFFFFF"/>
+              <a:rPr sz="2000" b="0" i="0">
+                <a:solidFill>
+                  <a:srgbClr val="828282"/>
                 </a:solidFill>
                 <a:latin typeface="Arial"/>
               </a:rPr>
-              <a:t>Vivendo, Ele me amou</a:t>
+              <a:t>死の墓を　いま飛び出そう</a:t>
             </a:r>
           </a:p>
         </p:txBody>
@@ -4255,8 +4185,8 @@
         </p:nvSpPr>
         <p:spPr>
           <a:xfrm>
-            <a:off x="594360" y="4251960"/>
-            <a:ext cx="11002975" cy="347472"/>
+            <a:off x="640080" y="4494276"/>
+            <a:ext cx="10911535" cy="310896"/>
           </a:xfrm>
           <a:prstGeom prst="rect">
             <a:avLst/>
@@ -4271,9 +4201,9 @@
           <a:p>
             <a:pPr algn="ctr"/>
             <a:r>
-              <a:rPr sz="2200" b="0" i="1">
-                <a:solidFill>
-                  <a:srgbClr val="8C8C8C"/>
+              <a:rPr sz="2000" b="0" i="0">
+                <a:solidFill>
+                  <a:srgbClr val="828282"/>
                 </a:solidFill>
                 <a:latin typeface="Arial"/>
               </a:rPr>
@@ -4316,8 +4246,8 @@
         </p:nvSpPr>
         <p:spPr>
           <a:xfrm>
-            <a:off x="594360" y="2258568"/>
-            <a:ext cx="11002975" cy="685800"/>
+            <a:off x="640080" y="2052828"/>
+            <a:ext cx="10911535" cy="731520"/>
           </a:xfrm>
           <a:prstGeom prst="rect">
             <a:avLst/>
@@ -4332,7 +4262,7 @@
           <a:p>
             <a:pPr algn="ctr"/>
             <a:r>
-              <a:rPr sz="4400" b="1" i="0">
+              <a:rPr sz="4800" b="1" i="0">
                 <a:solidFill>
                   <a:srgbClr val="FFFFFF"/>
                 </a:solidFill>
@@ -4351,8 +4281,8 @@
         </p:nvSpPr>
         <p:spPr>
           <a:xfrm>
-            <a:off x="594360" y="2980944"/>
-            <a:ext cx="11002975" cy="347472"/>
+            <a:off x="640080" y="2985516"/>
+            <a:ext cx="10911535" cy="731520"/>
           </a:xfrm>
           <a:prstGeom prst="rect">
             <a:avLst/>
@@ -4367,83 +4297,13 @@
           <a:p>
             <a:pPr algn="ctr"/>
             <a:r>
-              <a:rPr sz="2200" b="0" i="1">
-                <a:solidFill>
-                  <a:srgbClr val="8C8C8C"/>
-                </a:solidFill>
-                <a:latin typeface="Arial"/>
-              </a:rPr>
-              <a:t/>
-            </a:r>
-          </a:p>
-        </p:txBody>
-      </p:sp>
-      <p:sp>
-        <p:nvSpPr>
-          <p:cNvPr id="4" name="TextBox 3"/>
-          <p:cNvSpPr txBox="1"/>
-          <p:nvPr/>
-        </p:nvSpPr>
-        <p:spPr>
-          <a:xfrm>
-            <a:off x="594360" y="3529584"/>
-            <a:ext cx="11002975" cy="685800"/>
-          </a:xfrm>
-          <a:prstGeom prst="rect">
-            <a:avLst/>
-          </a:prstGeom>
-          <a:noFill/>
-        </p:spPr>
-        <p:txBody>
-          <a:bodyPr wrap="square">
-            <a:spAutoFit/>
-          </a:bodyPr>
-          <a:lstStyle/>
-          <a:p>
-            <a:pPr algn="ctr"/>
-            <a:r>
-              <a:rPr sz="4400" b="1" i="0">
+              <a:rPr sz="4800" b="1" i="0">
                 <a:solidFill>
                   <a:srgbClr val="FFFFFF"/>
                 </a:solidFill>
                 <a:latin typeface="Arial"/>
               </a:rPr>
               <a:t>Um dia Ele está vindo</a:t>
-            </a:r>
-          </a:p>
-        </p:txBody>
-      </p:sp>
-      <p:sp>
-        <p:nvSpPr>
-          <p:cNvPr id="5" name="TextBox 4"/>
-          <p:cNvSpPr txBox="1"/>
-          <p:nvPr/>
-        </p:nvSpPr>
-        <p:spPr>
-          <a:xfrm>
-            <a:off x="594360" y="4251960"/>
-            <a:ext cx="11002975" cy="347472"/>
-          </a:xfrm>
-          <a:prstGeom prst="rect">
-            <a:avLst/>
-          </a:prstGeom>
-          <a:noFill/>
-        </p:spPr>
-        <p:txBody>
-          <a:bodyPr wrap="square">
-            <a:spAutoFit/>
-          </a:bodyPr>
-          <a:lstStyle/>
-          <a:p>
-            <a:pPr algn="ctr"/>
-            <a:r>
-              <a:rPr sz="2200" b="0" i="1">
-                <a:solidFill>
-                  <a:srgbClr val="8C8C8C"/>
-                </a:solidFill>
-                <a:latin typeface="Arial"/>
-              </a:rPr>
-              <a:t/>
             </a:r>
           </a:p>
         </p:txBody>

--- a/output_pptx/Glorious_Day.pptx
+++ b/output_pptx/Glorious_Day.pptx
@@ -3880,6 +3880,76 @@
           </a:p>
         </p:txBody>
       </p:sp>
+      <p:sp>
+        <p:nvSpPr>
+          <p:cNvPr id="4" name="TextBox 3"/>
+          <p:cNvSpPr txBox="1"/>
+          <p:nvPr/>
+        </p:nvSpPr>
+        <p:spPr>
+          <a:xfrm>
+            <a:off x="640080" y="4128516"/>
+            <a:ext cx="10911535" cy="310896"/>
+          </a:xfrm>
+          <a:prstGeom prst="rect">
+            <a:avLst/>
+          </a:prstGeom>
+          <a:noFill/>
+        </p:spPr>
+        <p:txBody>
+          <a:bodyPr wrap="square">
+            <a:spAutoFit/>
+          </a:bodyPr>
+          <a:lstStyle/>
+          <a:p>
+            <a:pPr algn="ctr"/>
+            <a:r>
+              <a:rPr sz="2000" b="0" i="0">
+                <a:solidFill>
+                  <a:srgbClr val="828282"/>
+                </a:solidFill>
+                <a:latin typeface="Arial"/>
+              </a:rPr>
+              <a:t>死によりて、彼は私を救った</a:t>
+            </a:r>
+          </a:p>
+        </p:txBody>
+      </p:sp>
+      <p:sp>
+        <p:nvSpPr>
+          <p:cNvPr id="5" name="TextBox 4"/>
+          <p:cNvSpPr txBox="1"/>
+          <p:nvPr/>
+        </p:nvSpPr>
+        <p:spPr>
+          <a:xfrm>
+            <a:off x="640080" y="4494276"/>
+            <a:ext cx="10911535" cy="310896"/>
+          </a:xfrm>
+          <a:prstGeom prst="rect">
+            <a:avLst/>
+          </a:prstGeom>
+          <a:noFill/>
+        </p:spPr>
+        <p:txBody>
+          <a:bodyPr wrap="square">
+            <a:spAutoFit/>
+          </a:bodyPr>
+          <a:lstStyle/>
+          <a:p>
+            <a:pPr algn="ctr"/>
+            <a:r>
+              <a:rPr sz="2000" b="0" i="0">
+                <a:solidFill>
+                  <a:srgbClr val="828282"/>
+                </a:solidFill>
+                <a:latin typeface="Arial"/>
+              </a:rPr>
+              <a:t>復活により、彼は私を義とした</a:t>
+            </a:r>
+          </a:p>
+        </p:txBody>
+      </p:sp>
     </p:spTree>
   </p:cSld>
   <p:clrMapOvr>
@@ -4304,6 +4374,76 @@
                 <a:latin typeface="Arial"/>
               </a:rPr>
               <a:t>Um dia Ele está vindo</a:t>
+            </a:r>
+          </a:p>
+        </p:txBody>
+      </p:sp>
+      <p:sp>
+        <p:nvSpPr>
+          <p:cNvPr id="4" name="TextBox 3"/>
+          <p:cNvSpPr txBox="1"/>
+          <p:nvPr/>
+        </p:nvSpPr>
+        <p:spPr>
+          <a:xfrm>
+            <a:off x="640080" y="4128516"/>
+            <a:ext cx="10911535" cy="310896"/>
+          </a:xfrm>
+          <a:prstGeom prst="rect">
+            <a:avLst/>
+          </a:prstGeom>
+          <a:noFill/>
+        </p:spPr>
+        <p:txBody>
+          <a:bodyPr wrap="square">
+            <a:spAutoFit/>
+          </a:bodyPr>
+          <a:lstStyle/>
+          <a:p>
+            <a:pPr algn="ctr"/>
+            <a:r>
+              <a:rPr sz="2000" b="0" i="0">
+                <a:solidFill>
+                  <a:srgbClr val="828282"/>
+                </a:solidFill>
+                <a:latin typeface="Arial"/>
+              </a:rPr>
+              <a:t>永遠に自由に</a:t>
+            </a:r>
+          </a:p>
+        </p:txBody>
+      </p:sp>
+      <p:sp>
+        <p:nvSpPr>
+          <p:cNvPr id="5" name="TextBox 4"/>
+          <p:cNvSpPr txBox="1"/>
+          <p:nvPr/>
+        </p:nvSpPr>
+        <p:spPr>
+          <a:xfrm>
+            <a:off x="640080" y="4494276"/>
+            <a:ext cx="10911535" cy="310896"/>
+          </a:xfrm>
+          <a:prstGeom prst="rect">
+            <a:avLst/>
+          </a:prstGeom>
+          <a:noFill/>
+        </p:spPr>
+        <p:txBody>
+          <a:bodyPr wrap="square">
+            <a:spAutoFit/>
+          </a:bodyPr>
+          <a:lstStyle/>
+          <a:p>
+            <a:pPr algn="ctr"/>
+            <a:r>
+              <a:rPr sz="2000" b="0" i="0">
+                <a:solidFill>
+                  <a:srgbClr val="828282"/>
+                </a:solidFill>
+                <a:latin typeface="Arial"/>
+              </a:rPr>
+              <a:t>ある日、彼は来られる</a:t>
             </a:r>
           </a:p>
         </p:txBody>
